--- a/S02_Practico0/¿Cómo definir un lenguaje_.pptx
+++ b/S02_Practico0/¿Cómo definir un lenguaje_.pptx
@@ -9240,7 +9240,11 @@
             </a:pPr>
             <a:r>
               <a:rPr lang="es" sz="1400" dirty="0"/>
-              <a:t>Metalenguaje -&gt; Backus Naur Form (BNF), Deducción Natural (BNF)</a:t>
+              <a:t>Metalenguaje -&gt; Backus Naur Form (BNF), Deducción </a:t>
+            </a:r>
+            <a:r>
+              <a:rPr lang="es" sz="1400"/>
+              <a:t>Natural (DN)</a:t>
             </a:r>
             <a:endParaRPr sz="1400" dirty="0"/>
           </a:p>
